--- a/10 - Statistical Inference Tests/Chi-squared Test.pptx
+++ b/10 - Statistical Inference Tests/Chi-squared Test.pptx
@@ -16444,7 +16444,15 @@
                 </a:r>
                 <a:r>
                   <a:rPr lang="en-US" altLang="en-US" sz="2500" dirty="0"/>
-                  <a:t>then we reject the null hypothesis.  </a:t>
+                  <a:t>then we </a:t>
+                </a:r>
+                <a:r>
+                  <a:rPr lang="en-US" altLang="en-US" sz="2500"/>
+                  <a:t>fail to reject </a:t>
+                </a:r>
+                <a:r>
+                  <a:rPr lang="en-US" altLang="en-US" sz="2500" dirty="0"/>
+                  <a:t>the null hypothesis.  </a:t>
                 </a:r>
               </a:p>
               <a:p>
